--- a/assets/ppts/M2.2.6_QoS_Traffic_Shaping.pptx
+++ b/assets/ppts/M2.2.6_QoS_Traffic_Shaping.pptx
@@ -8,6 +8,7 @@
     <p:sldId id="256" r:id="rId7"/>
     <p:sldId id="257" r:id="rId8"/>
     <p:sldId id="258" r:id="rId9"/>
+    <p:sldId id="259" r:id="rId10"/>
   </p:sldIdLst>
   <p:sldSz cx="12191695" cy="6858000" type="screen4x3"/>
   <p:notesSz cx="6858000" cy="9144000"/>
@@ -3141,8 +3142,8 @@
         </p:nvSpPr>
         <p:spPr>
           <a:xfrm>
-            <a:off x="822960" y="1188720"/>
-            <a:ext cx="164592" cy="4480560"/>
+            <a:off x="0" y="0"/>
+            <a:ext cx="12191695" cy="137160"/>
           </a:xfrm>
           <a:prstGeom prst="rect">
             <a:avLst/>
@@ -3178,14 +3179,57 @@
       </p:sp>
       <p:sp>
         <p:nvSpPr>
-          <p:cNvPr id="4" name="TextBox 3"/>
+          <p:cNvPr id="4" name="Rectangle 3"/>
+          <p:cNvSpPr/>
+          <p:nvPr/>
+        </p:nvSpPr>
+        <p:spPr>
+          <a:xfrm>
+            <a:off x="822960" y="1097280"/>
+            <a:ext cx="164592" cy="4663440"/>
+          </a:xfrm>
+          <a:prstGeom prst="rect">
+            <a:avLst/>
+          </a:prstGeom>
+          <a:solidFill>
+            <a:srgbClr val="D97706"/>
+          </a:solidFill>
+          <a:ln>
+            <a:noFill/>
+          </a:ln>
+        </p:spPr>
+        <p:style>
+          <a:lnRef idx="1">
+            <a:schemeClr val="accent1"/>
+          </a:lnRef>
+          <a:fillRef idx="3">
+            <a:schemeClr val="accent1"/>
+          </a:fillRef>
+          <a:effectRef idx="2">
+            <a:schemeClr val="accent1"/>
+          </a:effectRef>
+          <a:fontRef idx="minor">
+            <a:schemeClr val="lt1"/>
+          </a:fontRef>
+        </p:style>
+        <p:txBody>
+          <a:bodyPr rtlCol="0" anchor="ctr"/>
+          <a:lstStyle/>
+          <a:p>
+            <a:pPr algn="ctr"/>
+          </a:p>
+        </p:txBody>
+      </p:sp>
+      <p:sp>
+        <p:nvSpPr>
+          <p:cNvPr id="5" name="TextBox 4"/>
           <p:cNvSpPr txBox="1"/>
           <p:nvPr/>
         </p:nvSpPr>
         <p:spPr>
           <a:xfrm>
-            <a:off x="1280160" y="1097280"/>
-            <a:ext cx="10058400" cy="4663440"/>
+            <a:off x="1234440" y="1005840"/>
+            <a:ext cx="10241280" cy="4846320"/>
           </a:xfrm>
           <a:prstGeom prst="rect">
             <a:avLst/>
@@ -3200,70 +3244,165 @@
           <a:p>
             <a:pPr>
               <a:spcAft>
+                <a:spcPts val="1000"/>
+              </a:spcAft>
+              <a:defRPr b="1" sz="1300">
+                <a:solidFill>
+                  <a:srgbClr val="D97706"/>
+                </a:solidFill>
+              </a:defRPr>
+            </a:pPr>
+            <a:r>
+              <a:t>PCCST501 Computer Networks | KTU 2024 Scheme • MODULE 2 • M2.2.6</a:t>
+            </a:r>
+          </a:p>
+          <a:p>
+            <a:pPr>
+              <a:spcAft>
                 <a:spcPts val="1200"/>
               </a:spcAft>
-              <a:defRPr b="1" sz="1300">
-                <a:solidFill>
-                  <a:srgbClr val="D97706"/>
+              <a:defRPr b="1" sz="3000">
+                <a:solidFill>
+                  <a:srgbClr val="F8FAFC"/>
                 </a:solidFill>
               </a:defRPr>
             </a:pPr>
             <a:r>
-              <a:t>PCCST501 Computer Networks | KTU 2024 Scheme • MODULE 2 • M2.2.6</a:t>
+              <a:t>Quality of Service (QoS) &amp; Traffic Shaping</a:t>
             </a:r>
           </a:p>
           <a:p>
             <a:pPr>
               <a:spcAft>
-                <a:spcPts val="1400"/>
+                <a:spcPts val="2400"/>
               </a:spcAft>
-              <a:defRPr b="1" sz="3200">
-                <a:solidFill>
-                  <a:srgbClr val="F8FAFC"/>
+              <a:defRPr sz="1600">
+                <a:solidFill>
+                  <a:srgbClr val="94A3B8"/>
                 </a:solidFill>
               </a:defRPr>
             </a:pPr>
             <a:r>
-              <a:t>Quality of Service (QoS) &amp; Traffic Shaping</a:t>
+              <a:t>QoS Metrics (Delay, Jitter, Loss), Traffic Policing vs Shaping, Leaky Bucket vs Token Bucket, Scheduling (FIFO, WFQ), DiffServ vs IntServ</a:t>
             </a:r>
           </a:p>
           <a:p>
             <a:pPr>
               <a:spcAft>
-                <a:spcPts val="2800"/>
+                <a:spcPts val="300"/>
               </a:spcAft>
-              <a:defRPr sz="1700">
+              <a:defRPr b="1" sz="1350">
+                <a:solidFill>
+                  <a:srgbClr val="E2E8F0"/>
+                </a:solidFill>
+              </a:defRPr>
+            </a:pPr>
+            <a:r>
+              <a:t>Prepared by: Prof. Anju Markose | Assistant Professor, Dept. of CSE | VJCET</a:t>
+            </a:r>
+          </a:p>
+          <a:p>
+            <a:pPr>
+              <a:defRPr sz="1150">
                 <a:solidFill>
                   <a:srgbClr val="94A3B8"/>
                 </a:solidFill>
               </a:defRPr>
             </a:pPr>
             <a:r>
-              <a:t>QoS Principles, Traffic Shaping Algorithms: Leaky Bucket vs Token Bucket, Integrated Services &amp; Differentiated Services</a:t>
-            </a:r>
-          </a:p>
+              <a:t>Viswajyothi College of Engineering and Technology (VJCET), Vazhakulam • KTU S5 CSE</a:t>
+            </a:r>
+          </a:p>
+        </p:txBody>
+      </p:sp>
+      <p:sp>
+        <p:nvSpPr>
+          <p:cNvPr id="6" name="Rounded Rectangle 5"/>
+          <p:cNvSpPr/>
+          <p:nvPr/>
+        </p:nvSpPr>
+        <p:spPr>
+          <a:xfrm>
+            <a:off x="8412480" y="5120640"/>
+            <a:ext cx="3017520" cy="822960"/>
+          </a:xfrm>
+          <a:prstGeom prst="roundRect">
+            <a:avLst/>
+          </a:prstGeom>
+          <a:solidFill>
+            <a:srgbClr val="1E293B"/>
+          </a:solidFill>
+          <a:ln w="12700">
+            <a:solidFill>
+              <a:srgbClr val="0E7490"/>
+            </a:solidFill>
+          </a:ln>
+        </p:spPr>
+        <p:style>
+          <a:lnRef idx="1">
+            <a:schemeClr val="accent1"/>
+          </a:lnRef>
+          <a:fillRef idx="3">
+            <a:schemeClr val="accent1"/>
+          </a:fillRef>
+          <a:effectRef idx="2">
+            <a:schemeClr val="accent1"/>
+          </a:effectRef>
+          <a:fontRef idx="minor">
+            <a:schemeClr val="lt1"/>
+          </a:fontRef>
+        </p:style>
+        <p:txBody>
+          <a:bodyPr rtlCol="0" anchor="ctr"/>
+          <a:lstStyle/>
+          <a:p>
+            <a:pPr algn="ctr"/>
+          </a:p>
+        </p:txBody>
+      </p:sp>
+      <p:sp>
+        <p:nvSpPr>
+          <p:cNvPr id="7" name="TextBox 6"/>
+          <p:cNvSpPr txBox="1"/>
+          <p:nvPr/>
+        </p:nvSpPr>
+        <p:spPr>
+          <a:xfrm>
+            <a:off x="8503920" y="5166360"/>
+            <a:ext cx="2834640" cy="731520"/>
+          </a:xfrm>
+          <a:prstGeom prst="rect">
+            <a:avLst/>
+          </a:prstGeom>
+          <a:noFill/>
+        </p:spPr>
+        <p:txBody>
+          <a:bodyPr wrap="none">
+            <a:spAutoFit/>
+          </a:bodyPr>
+          <a:lstStyle/>
           <a:p>
             <a:pPr>
-              <a:defRPr b="1" sz="1300">
-                <a:solidFill>
-                  <a:srgbClr val="E2E8F0"/>
+              <a:defRPr b="1" sz="1050">
+                <a:solidFill>
+                  <a:srgbClr val="D97706"/>
                 </a:solidFill>
               </a:defRPr>
             </a:pPr>
             <a:r>
-              <a:t>Prepared by: Prof. Anju Markose | Assistant Professor, Dept. of CSE | VJCET</a:t>
+              <a:t>KTU B.Tech Curriculum</a:t>
             </a:r>
           </a:p>
           <a:p>
             <a:pPr>
-              <a:defRPr sz="1100">
-                <a:solidFill>
-                  <a:srgbClr val="94A3B8"/>
+              <a:defRPr sz="950">
+                <a:solidFill>
+                  <a:srgbClr val="F8FAFC"/>
                 </a:solidFill>
               </a:defRPr>
             </a:pPr>
             <a:r>
-              <a:t>Viswajyothi College of Engineering and Technology (VJCET), Vazhakulam</a:t>
+              <a:t>Official Classroom Slide Deck</a:t>
             </a:r>
           </a:p>
         </p:txBody>
@@ -3395,7 +3534,7 @@
           <a:lstStyle/>
           <a:p>
             <a:pPr>
-              <a:defRPr b="1" sz="2300">
+              <a:defRPr b="1" sz="2200">
                 <a:solidFill>
                   <a:srgbClr val="F8FAFC"/>
                 </a:solidFill>
@@ -3437,7 +3576,7 @@
               </a:defRPr>
             </a:pPr>
             <a:r>
-              <a:t>M2.2.6 LEAKY VS TOKEN BUCKET</a:t>
+              <a:t>M2.2.6 TRAFFIC SHAPING</a:t>
             </a:r>
           </a:p>
         </p:txBody>
@@ -3450,18 +3589,18 @@
         </p:nvSpPr>
         <p:spPr>
           <a:xfrm>
-            <a:off x="731520" y="1280160"/>
-            <a:ext cx="5212080" cy="4846320"/>
+            <a:off x="731520" y="1234440"/>
+            <a:ext cx="5212080" cy="4892040"/>
           </a:xfrm>
           <a:prstGeom prst="roundRect">
             <a:avLst/>
           </a:prstGeom>
           <a:solidFill>
-            <a:srgbClr val="F1F5F9"/>
+            <a:srgbClr val="F8FAFC"/>
           </a:solidFill>
           <a:ln w="19050">
             <a:solidFill>
-              <a:srgbClr val="0E7490"/>
+              <a:srgbClr val="0F1E4A"/>
             </a:solidFill>
           </a:ln>
         </p:spPr>
@@ -3495,7 +3634,7 @@
         </p:nvSpPr>
         <p:spPr>
           <a:xfrm>
-            <a:off x="914400" y="1417320"/>
+            <a:off x="914400" y="1371600"/>
             <a:ext cx="4846320" cy="4572000"/>
           </a:xfrm>
           <a:prstGeom prst="rect">
@@ -3511,76 +3650,76 @@
           <a:p>
             <a:pPr>
               <a:spcAft>
-                <a:spcPts val="1200"/>
+                <a:spcPts val="1000"/>
               </a:spcAft>
-              <a:defRPr b="1" sz="1600">
+              <a:defRPr b="1" sz="1550">
                 <a:solidFill>
                   <a:srgbClr val="0F1E4A"/>
                 </a:solidFill>
               </a:defRPr>
             </a:pPr>
             <a:r>
-              <a:t>Leaky Bucket Algorithm</a:t>
+              <a:t>Leaky Bucket Algorithm (Constant Output)</a:t>
             </a:r>
           </a:p>
           <a:p>
             <a:pPr>
               <a:spcAft>
-                <a:spcPts val="600"/>
+                <a:spcPts val="500"/>
               </a:spcAft>
-              <a:defRPr sz="1250">
-                <a:solidFill>
-                  <a:srgbClr val="1E293B"/>
+              <a:defRPr sz="1200">
+                <a:solidFill>
+                  <a:srgbClr val="0F172A"/>
                 </a:solidFill>
               </a:defRPr>
             </a:pPr>
             <a:r>
-              <a:t>• Mechanism: Packets enter bucket of capacity $C$; leak out bottom at constant fixed rate $r$</a:t>
+              <a:t>• Concept: A bucket with a hole at the bottom; incoming packets buffer up to bucket capacity $C$ and leak out at a strictly constant rate $\rho$</a:t>
             </a:r>
           </a:p>
           <a:p>
             <a:pPr>
               <a:spcAft>
-                <a:spcPts val="600"/>
+                <a:spcPts val="500"/>
               </a:spcAft>
-              <a:defRPr sz="1250">
-                <a:solidFill>
-                  <a:srgbClr val="1E293B"/>
+              <a:defRPr sz="1200">
+                <a:solidFill>
+                  <a:srgbClr val="0F172A"/>
                 </a:solidFill>
               </a:defRPr>
             </a:pPr>
             <a:r>
-              <a:t>• Output Rate: Strictly constant / smooth transmission rate; zero bursts allowed</a:t>
+              <a:t>• Output Profile: Strictly constant, smooth output stream regardless of incoming burstiness</a:t>
             </a:r>
           </a:p>
           <a:p>
             <a:pPr>
               <a:spcAft>
-                <a:spcPts val="600"/>
+                <a:spcPts val="500"/>
               </a:spcAft>
-              <a:defRPr sz="1250">
-                <a:solidFill>
-                  <a:srgbClr val="1E293B"/>
+              <a:defRPr sz="1200">
+                <a:solidFill>
+                  <a:srgbClr val="0F172A"/>
                 </a:solidFill>
               </a:defRPr>
             </a:pPr>
             <a:r>
-              <a:t>• Overflow: If arriving packet overflows bucket capacity, it is discarded</a:t>
+              <a:t>• Burst Handling: Eliminates bursts entirely; discards packets if bucket overflows</a:t>
             </a:r>
           </a:p>
           <a:p>
             <a:pPr>
               <a:spcAft>
-                <a:spcPts val="600"/>
+                <a:spcPts val="500"/>
               </a:spcAft>
-              <a:defRPr sz="1250">
-                <a:solidFill>
-                  <a:srgbClr val="1E293B"/>
+              <a:defRPr sz="1200">
+                <a:solidFill>
+                  <a:srgbClr val="0F172A"/>
                 </a:solidFill>
               </a:defRPr>
             </a:pPr>
             <a:r>
-              <a:t>• Best For: Strict traffic policing and real-time constant-bitrate audio (CBR)</a:t>
+              <a:t>• Suitability: Constant Bit Rate (CBR) traffic like uncompressed voice</a:t>
             </a:r>
           </a:p>
         </p:txBody>
@@ -3593,8 +3732,8 @@
         </p:nvSpPr>
         <p:spPr>
           <a:xfrm>
-            <a:off x="6309360" y="1280160"/>
-            <a:ext cx="5212080" cy="4846320"/>
+            <a:off x="6309360" y="1234440"/>
+            <a:ext cx="5212080" cy="4892040"/>
           </a:xfrm>
           <a:prstGeom prst="roundRect">
             <a:avLst/>
@@ -3604,7 +3743,7 @@
           </a:solidFill>
           <a:ln w="19050">
             <a:solidFill>
-              <a:srgbClr val="0F1E4A"/>
+              <a:srgbClr val="0E7490"/>
             </a:solidFill>
           </a:ln>
         </p:spPr>
@@ -3638,7 +3777,7 @@
         </p:nvSpPr>
         <p:spPr>
           <a:xfrm>
-            <a:off x="6492240" y="1417320"/>
+            <a:off x="6492240" y="1371600"/>
             <a:ext cx="4846320" cy="4572000"/>
           </a:xfrm>
           <a:prstGeom prst="rect">
@@ -3654,76 +3793,76 @@
           <a:p>
             <a:pPr>
               <a:spcAft>
-                <a:spcPts val="1200"/>
+                <a:spcPts val="1000"/>
               </a:spcAft>
-              <a:defRPr b="1" sz="1600">
+              <a:defRPr b="1" sz="1550">
                 <a:solidFill>
                   <a:srgbClr val="0E7490"/>
                 </a:solidFill>
               </a:defRPr>
             </a:pPr>
             <a:r>
-              <a:t>Token Bucket Algorithm</a:t>
+              <a:t>Token Bucket Algorithm (Burst-Tolerant)</a:t>
             </a:r>
           </a:p>
           <a:p>
             <a:pPr>
               <a:spcAft>
-                <a:spcPts val="600"/>
+                <a:spcPts val="500"/>
               </a:spcAft>
-              <a:defRPr sz="1250">
-                <a:solidFill>
-                  <a:srgbClr val="1E293B"/>
+              <a:defRPr sz="1200">
+                <a:solidFill>
+                  <a:srgbClr val="0F172A"/>
                 </a:solidFill>
               </a:defRPr>
             </a:pPr>
             <a:r>
-              <a:t>• Mechanism: Tokens generated at constant rate $r$ into bucket of capacity $b$. Packet sent only if enough tokens present</a:t>
+              <a:t>• Concept: Tokens generate at rate $r$ tokens/sec up to max token capacity $b$. A packet of size $m$ bytes consumes $m$ tokens to transmit</a:t>
             </a:r>
           </a:p>
           <a:p>
             <a:pPr>
               <a:spcAft>
-                <a:spcPts val="600"/>
+                <a:spcPts val="500"/>
               </a:spcAft>
-              <a:defRPr sz="1250">
-                <a:solidFill>
-                  <a:srgbClr val="1E293B"/>
+              <a:defRPr sz="1200">
+                <a:solidFill>
+                  <a:srgbClr val="0F172A"/>
                 </a:solidFill>
               </a:defRPr>
             </a:pPr>
             <a:r>
-              <a:t>• Output Rate: Allows controlled burst transmission up to bucket capacity $b$, with average rate $r$</a:t>
+              <a:t>• Output Profile: Allows short-term traffic bursts up to bucket size $b$ while enforcing average long-term rate $r$</a:t>
             </a:r>
           </a:p>
           <a:p>
             <a:pPr>
               <a:spcAft>
-                <a:spcPts val="600"/>
+                <a:spcPts val="500"/>
               </a:spcAft>
-              <a:defRPr sz="1250">
-                <a:solidFill>
-                  <a:srgbClr val="1E293B"/>
+              <a:defRPr sz="1200">
+                <a:solidFill>
+                  <a:srgbClr val="0F172A"/>
                 </a:solidFill>
               </a:defRPr>
             </a:pPr>
             <a:r>
-              <a:t>• Burst Duration: Max burst size $= b + r \times t$</a:t>
+              <a:t>• Burst Handling: Max burst transmission speed = link wire rate $R$ for duration $T = b / (R - r)$</a:t>
             </a:r>
           </a:p>
           <a:p>
             <a:pPr>
               <a:spcAft>
-                <a:spcPts val="600"/>
+                <a:spcPts val="500"/>
               </a:spcAft>
-              <a:defRPr sz="1250">
-                <a:solidFill>
-                  <a:srgbClr val="1E293B"/>
+              <a:defRPr sz="1200">
+                <a:solidFill>
+                  <a:srgbClr val="0F172A"/>
                 </a:solidFill>
               </a:defRPr>
             </a:pPr>
             <a:r>
-              <a:t>• Best For: Bursty Internet data traffic (Web, video streaming, database queries)</a:t>
+              <a:t>• Suitability: Variable Bit Rate (VBR) video streaming and web traffic</a:t>
             </a:r>
           </a:p>
         </p:txBody>
@@ -3736,8 +3875,8 @@
         </p:nvSpPr>
         <p:spPr>
           <a:xfrm>
-            <a:off x="731520" y="6309360"/>
-            <a:ext cx="10789920" cy="365760"/>
+            <a:off x="731520" y="6327648"/>
+            <a:ext cx="10789920" cy="320040"/>
           </a:xfrm>
           <a:prstGeom prst="rect">
             <a:avLst/>
@@ -3759,6 +3898,41 @@
             </a:pPr>
             <a:r>
               <a:t>PCCST501 Computer Networks | KTU 2024 Scheme | Prof. Anju Markose | Assistant Professor, Dept. of CSE | VJCET</a:t>
+            </a:r>
+          </a:p>
+        </p:txBody>
+      </p:sp>
+      <p:sp>
+        <p:nvSpPr>
+          <p:cNvPr id="11" name="TextBox 10"/>
+          <p:cNvSpPr txBox="1"/>
+          <p:nvPr/>
+        </p:nvSpPr>
+        <p:spPr>
+          <a:xfrm>
+            <a:off x="6858000" y="6327648"/>
+            <a:ext cx="4572000" cy="320040"/>
+          </a:xfrm>
+          <a:prstGeom prst="rect">
+            <a:avLst/>
+          </a:prstGeom>
+          <a:noFill/>
+        </p:spPr>
+        <p:txBody>
+          <a:bodyPr wrap="none">
+            <a:spAutoFit/>
+          </a:bodyPr>
+          <a:lstStyle/>
+          <a:p>
+            <a:pPr algn="r">
+              <a:defRPr sz="950">
+                <a:solidFill>
+                  <a:srgbClr val="64748B"/>
+                </a:solidFill>
+              </a:defRPr>
+            </a:pPr>
+            <a:r>
+              <a:t>Dept. of CSE, VJCET</a:t>
             </a:r>
           </a:p>
         </p:txBody>
@@ -3890,14 +4064,14 @@
           <a:lstStyle/>
           <a:p>
             <a:pPr>
-              <a:defRPr b="1" sz="2300">
+              <a:defRPr b="1" sz="2200">
                 <a:solidFill>
                   <a:srgbClr val="F8FAFC"/>
                 </a:solidFill>
               </a:defRPr>
             </a:pPr>
             <a:r>
-              <a:t>2.2.6.2 Architectural QoS Models: IntServ vs DiffServ</a:t>
+              <a:t>2.2.6.2 Worked KTU Numerical: Token Bucket Burst Calculation</a:t>
             </a:r>
           </a:p>
         </p:txBody>
@@ -3932,174 +4106,31 @@
               </a:defRPr>
             </a:pPr>
             <a:r>
-              <a:t>M2.2.6 INTSERV VS DIFFSERV</a:t>
-            </a:r>
-          </a:p>
-        </p:txBody>
-      </p:sp>
-      <p:sp>
-        <p:nvSpPr>
-          <p:cNvPr id="6" name="TextBox 5"/>
-          <p:cNvSpPr txBox="1"/>
-          <p:nvPr/>
-        </p:nvSpPr>
-        <p:spPr>
-          <a:xfrm>
-            <a:off x="731520" y="1280160"/>
-            <a:ext cx="6858000" cy="4937760"/>
-          </a:xfrm>
-          <a:prstGeom prst="rect">
-            <a:avLst/>
-          </a:prstGeom>
-          <a:noFill/>
-        </p:spPr>
-        <p:txBody>
-          <a:bodyPr wrap="square">
-            <a:spAutoFit/>
-          </a:bodyPr>
-          <a:lstStyle/>
-          <a:p>
-            <a:pPr>
-              <a:spcAft>
-                <a:spcPts val="200"/>
-              </a:spcAft>
-              <a:defRPr b="1" sz="1500">
-                <a:solidFill>
-                  <a:srgbClr val="0F1E4A"/>
-                </a:solidFill>
-              </a:defRPr>
-            </a:pPr>
-            <a:r>
-              <a:t>• Integrated Services (IntServ / RFC 1633)</a:t>
-            </a:r>
-          </a:p>
-          <a:p>
-            <a:pPr>
-              <a:spcAft>
-                <a:spcPts val="800"/>
-              </a:spcAft>
-              <a:defRPr sz="1300">
-                <a:solidFill>
-                  <a:srgbClr val="1E293B"/>
-                </a:solidFill>
-              </a:defRPr>
-            </a:pPr>
-            <a:r>
-              <a:t>   Per-flow hard QoS guarantees. End hosts use RSVP (Resource Reservation Protocol) to reserve bandwidth and buffer space along entire path prior to data transmission.</a:t>
-            </a:r>
-          </a:p>
-          <a:p>
-            <a:pPr>
-              <a:spcAft>
-                <a:spcPts val="200"/>
-              </a:spcAft>
-              <a:defRPr b="1" sz="1500">
-                <a:solidFill>
-                  <a:srgbClr val="0F1E4A"/>
-                </a:solidFill>
-              </a:defRPr>
-            </a:pPr>
-            <a:r>
-              <a:t>• IntServ Scalability Problem</a:t>
-            </a:r>
-          </a:p>
-          <a:p>
-            <a:pPr>
-              <a:spcAft>
-                <a:spcPts val="800"/>
-              </a:spcAft>
-              <a:defRPr sz="1300">
-                <a:solidFill>
-                  <a:srgbClr val="1E293B"/>
-                </a:solidFill>
-              </a:defRPr>
-            </a:pPr>
-            <a:r>
-              <a:t>   Requires every core router to maintain state for millions of individual flows $\implies$ unscalable for the global Internet backbone.</a:t>
-            </a:r>
-          </a:p>
-          <a:p>
-            <a:pPr>
-              <a:spcAft>
-                <a:spcPts val="200"/>
-              </a:spcAft>
-              <a:defRPr b="1" sz="1500">
-                <a:solidFill>
-                  <a:srgbClr val="0F1E4A"/>
-                </a:solidFill>
-              </a:defRPr>
-            </a:pPr>
-            <a:r>
-              <a:t>• Differentiated Services (DiffServ / RFC 2475)</a:t>
-            </a:r>
-          </a:p>
-          <a:p>
-            <a:pPr>
-              <a:spcAft>
-                <a:spcPts val="800"/>
-              </a:spcAft>
-              <a:defRPr sz="1300">
-                <a:solidFill>
-                  <a:srgbClr val="1E293B"/>
-                </a:solidFill>
-              </a:defRPr>
-            </a:pPr>
-            <a:r>
-              <a:t>   Class-based soft QoS. Edge routers classify and mark packets by writing a 6-bit DSCP (Differentiated Services Code Point) value in IP header.</a:t>
-            </a:r>
-          </a:p>
-          <a:p>
-            <a:pPr>
-              <a:spcAft>
-                <a:spcPts val="200"/>
-              </a:spcAft>
-              <a:defRPr b="1" sz="1500">
-                <a:solidFill>
-                  <a:srgbClr val="0F1E4A"/>
-                </a:solidFill>
-              </a:defRPr>
-            </a:pPr>
-            <a:r>
-              <a:t>• Per-Hop Behaviors (PHB)</a:t>
-            </a:r>
-          </a:p>
-          <a:p>
-            <a:pPr>
-              <a:spcAft>
-                <a:spcPts val="800"/>
-              </a:spcAft>
-              <a:defRPr sz="1300">
-                <a:solidFill>
-                  <a:srgbClr val="1E293B"/>
-                </a:solidFill>
-              </a:defRPr>
-            </a:pPr>
-            <a:r>
-              <a:t>   Core routers inspect DSCP and schedule packets according to class without maintaining per-flow state (Expedited Forwarding EF for VoIP, Assured Forwarding AF for video).</a:t>
-            </a:r>
-          </a:p>
-        </p:txBody>
-      </p:sp>
-      <p:sp>
-        <p:nvSpPr>
-          <p:cNvPr id="7" name="Rounded Rectangle 6"/>
+              <a:t>M2.2.6 TOKEN BUCKET NUMERICAL</a:t>
+            </a:r>
+          </a:p>
+        </p:txBody>
+      </p:sp>
+      <p:sp>
+        <p:nvSpPr>
+          <p:cNvPr id="6" name="Rounded Rectangle 5"/>
           <p:cNvSpPr/>
           <p:nvPr/>
         </p:nvSpPr>
         <p:spPr>
           <a:xfrm>
-            <a:off x="7955279" y="1280160"/>
-            <a:ext cx="3566160" cy="4846320"/>
+            <a:off x="731520" y="1234440"/>
+            <a:ext cx="5486400" cy="4892040"/>
           </a:xfrm>
           <a:prstGeom prst="roundRect">
             <a:avLst/>
           </a:prstGeom>
           <a:solidFill>
-            <a:srgbClr val="F1F5F9"/>
+            <a:srgbClr val="F8FAFC"/>
           </a:solidFill>
           <a:ln w="19050">
             <a:solidFill>
-              <a:srgbClr val="0E7490"/>
+              <a:srgbClr val="0F1E4A"/>
             </a:solidFill>
           </a:ln>
         </p:spPr>
@@ -4127,14 +4158,14 @@
       </p:sp>
       <p:sp>
         <p:nvSpPr>
-          <p:cNvPr id="8" name="TextBox 7"/>
+          <p:cNvPr id="7" name="TextBox 6"/>
           <p:cNvSpPr txBox="1"/>
           <p:nvPr/>
         </p:nvSpPr>
         <p:spPr>
           <a:xfrm>
-            <a:off x="8138160" y="1417320"/>
-            <a:ext cx="3200400" cy="4572000"/>
+            <a:off x="914400" y="1371600"/>
+            <a:ext cx="5120640" cy="4572000"/>
           </a:xfrm>
           <a:prstGeom prst="rect">
             <a:avLst/>
@@ -4149,16 +4180,716 @@
           <a:p>
             <a:pPr>
               <a:spcAft>
+                <a:spcPts val="800"/>
+              </a:spcAft>
+              <a:defRPr b="1" sz="1450">
+                <a:solidFill>
+                  <a:srgbClr val="0F1E4A"/>
+                </a:solidFill>
+              </a:defRPr>
+            </a:pPr>
+            <a:r>
+              <a:t>📌 KTU Numerical Problem Statement</a:t>
+            </a:r>
+          </a:p>
+          <a:p>
+            <a:pPr>
+              <a:spcAft>
+                <a:spcPts val="1400"/>
+              </a:spcAft>
+              <a:defRPr sz="1250">
+                <a:solidFill>
+                  <a:srgbClr val="0F172A"/>
+                </a:solidFill>
+              </a:defRPr>
+            </a:pPr>
+            <a:r>
+              <a:t>A token bucket has token arrival rate r = 2 MB/sec and token bucket capacity b = 16 MB. The transmission link wire rate is R = 10 MB/sec. Calculate: (a) Maximum burst duration at wire rate R, (b) Maximum total data transmitted during this burst period.</a:t>
+            </a:r>
+          </a:p>
+          <a:p>
+            <a:pPr>
+              <a:spcAft>
+                <a:spcPts val="600"/>
+              </a:spcAft>
+              <a:defRPr b="1" sz="1350">
+                <a:solidFill>
+                  <a:srgbClr val="0E7490"/>
+                </a:solidFill>
+              </a:defRPr>
+            </a:pPr>
+            <a:r>
+              <a:t>📐 Governing Formulas &amp; Principles:</a:t>
+            </a:r>
+          </a:p>
+          <a:p>
+            <a:pPr>
+              <a:spcAft>
+                <a:spcPts val="400"/>
+              </a:spcAft>
+              <a:defRPr sz="1200">
+                <a:solidFill>
+                  <a:srgbClr val="0F172A"/>
+                </a:solidFill>
+              </a:defRPr>
+            </a:pPr>
+            <a:r>
+              <a:t>• Burst duration formula: T = b / (R - r)</a:t>
+            </a:r>
+          </a:p>
+          <a:p>
+            <a:pPr>
+              <a:spcAft>
+                <a:spcPts val="400"/>
+              </a:spcAft>
+              <a:defRPr sz="1200">
+                <a:solidFill>
+                  <a:srgbClr val="0F172A"/>
+                </a:solidFill>
+              </a:defRPr>
+            </a:pPr>
+            <a:r>
+              <a:t>• Where b = bucket size (MB), R = peak transmission rate (MB/s), r = token replenishment rate (MB/s).</a:t>
+            </a:r>
+          </a:p>
+          <a:p>
+            <a:pPr>
+              <a:spcAft>
+                <a:spcPts val="400"/>
+              </a:spcAft>
+              <a:defRPr sz="1200">
+                <a:solidFill>
+                  <a:srgbClr val="0F172A"/>
+                </a:solidFill>
+              </a:defRPr>
+            </a:pPr>
+            <a:r>
+              <a:t>• Total data transmitted during burst: D = R * T = (b * R) / (R - r).</a:t>
+            </a:r>
+          </a:p>
+        </p:txBody>
+      </p:sp>
+      <p:sp>
+        <p:nvSpPr>
+          <p:cNvPr id="8" name="Rounded Rectangle 7"/>
+          <p:cNvSpPr/>
+          <p:nvPr/>
+        </p:nvSpPr>
+        <p:spPr>
+          <a:xfrm>
+            <a:off x="6492240" y="1234440"/>
+            <a:ext cx="5029200" cy="4892040"/>
+          </a:xfrm>
+          <a:prstGeom prst="roundRect">
+            <a:avLst/>
+          </a:prstGeom>
+          <a:solidFill>
+            <a:srgbClr val="ECFDF5"/>
+          </a:solidFill>
+          <a:ln w="19050">
+            <a:solidFill>
+              <a:srgbClr val="10B981"/>
+            </a:solidFill>
+          </a:ln>
+        </p:spPr>
+        <p:style>
+          <a:lnRef idx="1">
+            <a:schemeClr val="accent1"/>
+          </a:lnRef>
+          <a:fillRef idx="3">
+            <a:schemeClr val="accent1"/>
+          </a:fillRef>
+          <a:effectRef idx="2">
+            <a:schemeClr val="accent1"/>
+          </a:effectRef>
+          <a:fontRef idx="minor">
+            <a:schemeClr val="lt1"/>
+          </a:fontRef>
+        </p:style>
+        <p:txBody>
+          <a:bodyPr rtlCol="0" anchor="ctr"/>
+          <a:lstStyle/>
+          <a:p>
+            <a:pPr algn="ctr"/>
+          </a:p>
+        </p:txBody>
+      </p:sp>
+      <p:sp>
+        <p:nvSpPr>
+          <p:cNvPr id="9" name="TextBox 8"/>
+          <p:cNvSpPr txBox="1"/>
+          <p:nvPr/>
+        </p:nvSpPr>
+        <p:spPr>
+          <a:xfrm>
+            <a:off x="6675120" y="1371600"/>
+            <a:ext cx="4663440" cy="4572000"/>
+          </a:xfrm>
+          <a:prstGeom prst="rect">
+            <a:avLst/>
+          </a:prstGeom>
+          <a:noFill/>
+        </p:spPr>
+        <p:txBody>
+          <a:bodyPr wrap="square">
+            <a:spAutoFit/>
+          </a:bodyPr>
+          <a:lstStyle/>
+          <a:p>
+            <a:pPr>
+              <a:spcAft>
+                <a:spcPts val="800"/>
+              </a:spcAft>
+              <a:defRPr b="1" sz="1450">
+                <a:solidFill>
+                  <a:srgbClr val="047857"/>
+                </a:solidFill>
+              </a:defRPr>
+            </a:pPr>
+            <a:r>
+              <a:t>📝 Step-by-Step Derivation &amp; Solution</a:t>
+            </a:r>
+          </a:p>
+          <a:p>
+            <a:pPr>
+              <a:spcAft>
+                <a:spcPts val="500"/>
+              </a:spcAft>
+              <a:defRPr sz="1200">
+                <a:solidFill>
+                  <a:srgbClr val="0F172A"/>
+                </a:solidFill>
+              </a:defRPr>
+            </a:pPr>
+            <a:r>
+              <a:t>Step 1: b = 16 MB, R = 10 MB/s, r = 2 MB/s</a:t>
+            </a:r>
+          </a:p>
+          <a:p>
+            <a:pPr>
+              <a:spcAft>
+                <a:spcPts val="500"/>
+              </a:spcAft>
+              <a:defRPr sz="1200">
+                <a:solidFill>
+                  <a:srgbClr val="0F172A"/>
+                </a:solidFill>
+              </a:defRPr>
+            </a:pPr>
+            <a:r>
+              <a:t>Step 2: T = 16 / (10 - 2) = 16 / 8 = 2.0 seconds</a:t>
+            </a:r>
+          </a:p>
+          <a:p>
+            <a:pPr>
+              <a:spcAft>
+                <a:spcPts val="500"/>
+              </a:spcAft>
+              <a:defRPr sz="1200">
+                <a:solidFill>
+                  <a:srgbClr val="0F172A"/>
+                </a:solidFill>
+              </a:defRPr>
+            </a:pPr>
+            <a:r>
+              <a:t>Step 3: Total data transmitted = R * T = 10 MB/s * 2.0 s = 20 MB</a:t>
+            </a:r>
+          </a:p>
+          <a:p>
+            <a:pPr>
+              <a:spcAft>
+                <a:spcPts val="500"/>
+              </a:spcAft>
+              <a:defRPr sz="1200">
+                <a:solidFill>
+                  <a:srgbClr val="0F172A"/>
+                </a:solidFill>
+              </a:defRPr>
+            </a:pPr>
+            <a:r>
+              <a:t>Step 4: Verification: Initial tokens (16 MB) + Newly generated tokens in 2s (2 MB/s * 2s = 4 MB) = 20 MB.</a:t>
+            </a:r>
+          </a:p>
+          <a:p>
+            <a:pPr>
+              <a:spcAft>
+                <a:spcPts val="800"/>
+              </a:spcAft>
+              <a:defRPr b="1" sz="1300">
+                <a:solidFill>
+                  <a:srgbClr val="047857"/>
+                </a:solidFill>
+              </a:defRPr>
+            </a:pPr>
+            <a:r>
+              <a:t>✅ FINAL ANSWER: Max Burst Duration T = 2.0 seconds | Total Burst Data = 20 MB</a:t>
+            </a:r>
+          </a:p>
+          <a:p>
+            <a:pPr>
+              <a:defRPr sz="1100">
+                <a:solidFill>
+                  <a:srgbClr val="64748B"/>
+                </a:solidFill>
+              </a:defRPr>
+            </a:pPr>
+            <a:r>
+              <a:t>💡 Exam Tip: After 2 seconds, the transmission rate drops strictly to the average token rate r = 2 MB/sec.</a:t>
+            </a:r>
+          </a:p>
+        </p:txBody>
+      </p:sp>
+      <p:sp>
+        <p:nvSpPr>
+          <p:cNvPr id="10" name="TextBox 9"/>
+          <p:cNvSpPr txBox="1"/>
+          <p:nvPr/>
+        </p:nvSpPr>
+        <p:spPr>
+          <a:xfrm>
+            <a:off x="731520" y="6327648"/>
+            <a:ext cx="10789920" cy="320040"/>
+          </a:xfrm>
+          <a:prstGeom prst="rect">
+            <a:avLst/>
+          </a:prstGeom>
+          <a:noFill/>
+        </p:spPr>
+        <p:txBody>
+          <a:bodyPr wrap="none">
+            <a:spAutoFit/>
+          </a:bodyPr>
+          <a:lstStyle/>
+          <a:p>
+            <a:pPr>
+              <a:defRPr sz="950">
+                <a:solidFill>
+                  <a:srgbClr val="64748B"/>
+                </a:solidFill>
+              </a:defRPr>
+            </a:pPr>
+            <a:r>
+              <a:t>PCCST501 Computer Networks | KTU 2024 Scheme | Prof. Anju Markose | Assistant Professor, Dept. of CSE | VJCET</a:t>
+            </a:r>
+          </a:p>
+        </p:txBody>
+      </p:sp>
+      <p:sp>
+        <p:nvSpPr>
+          <p:cNvPr id="11" name="TextBox 10"/>
+          <p:cNvSpPr txBox="1"/>
+          <p:nvPr/>
+        </p:nvSpPr>
+        <p:spPr>
+          <a:xfrm>
+            <a:off x="6858000" y="6327648"/>
+            <a:ext cx="4572000" cy="320040"/>
+          </a:xfrm>
+          <a:prstGeom prst="rect">
+            <a:avLst/>
+          </a:prstGeom>
+          <a:noFill/>
+        </p:spPr>
+        <p:txBody>
+          <a:bodyPr wrap="none">
+            <a:spAutoFit/>
+          </a:bodyPr>
+          <a:lstStyle/>
+          <a:p>
+            <a:pPr algn="r">
+              <a:defRPr sz="950">
+                <a:solidFill>
+                  <a:srgbClr val="64748B"/>
+                </a:solidFill>
+              </a:defRPr>
+            </a:pPr>
+            <a:r>
+              <a:t>Dept. of CSE, VJCET</a:t>
+            </a:r>
+          </a:p>
+        </p:txBody>
+      </p:sp>
+    </p:spTree>
+  </p:cSld>
+  <p:clrMapOvr>
+    <a:masterClrMapping/>
+  </p:clrMapOvr>
+</p:sld>
+</file>
+
+<file path=ppt/slides/slide4.xml><?xml version="1.0" encoding="utf-8"?>
+<p:sld xmlns:a="http://schemas.openxmlformats.org/drawingml/2006/main" xmlns:p="http://schemas.openxmlformats.org/presentationml/2006/main" xmlns:r="http://schemas.openxmlformats.org/officeDocument/2006/relationships">
+  <p:cSld>
+    <p:spTree>
+      <p:nvGrpSpPr>
+        <p:cNvPr id="1" name=""/>
+        <p:cNvGrpSpPr/>
+        <p:nvPr/>
+      </p:nvGrpSpPr>
+      <p:grpSpPr/>
+      <p:sp>
+        <p:nvSpPr>
+          <p:cNvPr id="2" name="Rectangle 1"/>
+          <p:cNvSpPr/>
+          <p:nvPr/>
+        </p:nvSpPr>
+        <p:spPr>
+          <a:xfrm>
+            <a:off x="0" y="0"/>
+            <a:ext cx="12191695" cy="1005840"/>
+          </a:xfrm>
+          <a:prstGeom prst="rect">
+            <a:avLst/>
+          </a:prstGeom>
+          <a:solidFill>
+            <a:srgbClr val="0F1E4A"/>
+          </a:solidFill>
+          <a:ln>
+            <a:noFill/>
+          </a:ln>
+        </p:spPr>
+        <p:style>
+          <a:lnRef idx="1">
+            <a:schemeClr val="accent1"/>
+          </a:lnRef>
+          <a:fillRef idx="3">
+            <a:schemeClr val="accent1"/>
+          </a:fillRef>
+          <a:effectRef idx="2">
+            <a:schemeClr val="accent1"/>
+          </a:effectRef>
+          <a:fontRef idx="minor">
+            <a:schemeClr val="lt1"/>
+          </a:fontRef>
+        </p:style>
+        <p:txBody>
+          <a:bodyPr rtlCol="0" anchor="ctr"/>
+          <a:lstStyle/>
+          <a:p>
+            <a:pPr algn="ctr"/>
+          </a:p>
+        </p:txBody>
+      </p:sp>
+      <p:sp>
+        <p:nvSpPr>
+          <p:cNvPr id="3" name="Rectangle 2"/>
+          <p:cNvSpPr/>
+          <p:nvPr/>
+        </p:nvSpPr>
+        <p:spPr>
+          <a:xfrm>
+            <a:off x="0" y="969264"/>
+            <a:ext cx="12191695" cy="36576"/>
+          </a:xfrm>
+          <a:prstGeom prst="rect">
+            <a:avLst/>
+          </a:prstGeom>
+          <a:solidFill>
+            <a:srgbClr val="D97706"/>
+          </a:solidFill>
+          <a:ln>
+            <a:noFill/>
+          </a:ln>
+        </p:spPr>
+        <p:style>
+          <a:lnRef idx="1">
+            <a:schemeClr val="accent1"/>
+          </a:lnRef>
+          <a:fillRef idx="3">
+            <a:schemeClr val="accent1"/>
+          </a:fillRef>
+          <a:effectRef idx="2">
+            <a:schemeClr val="accent1"/>
+          </a:effectRef>
+          <a:fontRef idx="minor">
+            <a:schemeClr val="lt1"/>
+          </a:fontRef>
+        </p:style>
+        <p:txBody>
+          <a:bodyPr rtlCol="0" anchor="ctr"/>
+          <a:lstStyle/>
+          <a:p>
+            <a:pPr algn="ctr"/>
+          </a:p>
+        </p:txBody>
+      </p:sp>
+      <p:sp>
+        <p:nvSpPr>
+          <p:cNvPr id="4" name="TextBox 3"/>
+          <p:cNvSpPr txBox="1"/>
+          <p:nvPr/>
+        </p:nvSpPr>
+        <p:spPr>
+          <a:xfrm>
+            <a:off x="731520" y="164592"/>
+            <a:ext cx="8412480" cy="685800"/>
+          </a:xfrm>
+          <a:prstGeom prst="rect">
+            <a:avLst/>
+          </a:prstGeom>
+          <a:noFill/>
+        </p:spPr>
+        <p:txBody>
+          <a:bodyPr wrap="none">
+            <a:spAutoFit/>
+          </a:bodyPr>
+          <a:lstStyle/>
+          <a:p>
+            <a:pPr>
+              <a:defRPr b="1" sz="2100">
+                <a:solidFill>
+                  <a:srgbClr val="F8FAFC"/>
+                </a:solidFill>
+              </a:defRPr>
+            </a:pPr>
+            <a:r>
+              <a:t>🎯 Exam Booster &amp; Review: Quality of Service (QoS)</a:t>
+            </a:r>
+          </a:p>
+        </p:txBody>
+      </p:sp>
+      <p:sp>
+        <p:nvSpPr>
+          <p:cNvPr id="5" name="TextBox 4"/>
+          <p:cNvSpPr txBox="1"/>
+          <p:nvPr/>
+        </p:nvSpPr>
+        <p:spPr>
+          <a:xfrm>
+            <a:off x="8229600" y="164592"/>
+            <a:ext cx="3291840" cy="685800"/>
+          </a:xfrm>
+          <a:prstGeom prst="rect">
+            <a:avLst/>
+          </a:prstGeom>
+          <a:noFill/>
+        </p:spPr>
+        <p:txBody>
+          <a:bodyPr wrap="none">
+            <a:spAutoFit/>
+          </a:bodyPr>
+          <a:lstStyle/>
+          <a:p>
+            <a:pPr algn="r">
+              <a:defRPr b="1" sz="1300">
+                <a:solidFill>
+                  <a:srgbClr val="D97706"/>
+                </a:solidFill>
+              </a:defRPr>
+            </a:pPr>
+            <a:r>
+              <a:t>M2.2.6</a:t>
+            </a:r>
+          </a:p>
+        </p:txBody>
+      </p:sp>
+      <p:sp>
+        <p:nvSpPr>
+          <p:cNvPr id="6" name="Rounded Rectangle 5"/>
+          <p:cNvSpPr/>
+          <p:nvPr/>
+        </p:nvSpPr>
+        <p:spPr>
+          <a:xfrm>
+            <a:off x="731520" y="1234440"/>
+            <a:ext cx="5303520" cy="4892040"/>
+          </a:xfrm>
+          <a:prstGeom prst="roundRect">
+            <a:avLst/>
+          </a:prstGeom>
+          <a:solidFill>
+            <a:srgbClr val="FEF3C7"/>
+          </a:solidFill>
+          <a:ln w="19050">
+            <a:solidFill>
+              <a:srgbClr val="D97706"/>
+            </a:solidFill>
+          </a:ln>
+        </p:spPr>
+        <p:style>
+          <a:lnRef idx="1">
+            <a:schemeClr val="accent1"/>
+          </a:lnRef>
+          <a:fillRef idx="3">
+            <a:schemeClr val="accent1"/>
+          </a:fillRef>
+          <a:effectRef idx="2">
+            <a:schemeClr val="accent1"/>
+          </a:effectRef>
+          <a:fontRef idx="minor">
+            <a:schemeClr val="lt1"/>
+          </a:fontRef>
+        </p:style>
+        <p:txBody>
+          <a:bodyPr rtlCol="0" anchor="ctr"/>
+          <a:lstStyle/>
+          <a:p>
+            <a:pPr algn="ctr"/>
+          </a:p>
+        </p:txBody>
+      </p:sp>
+      <p:sp>
+        <p:nvSpPr>
+          <p:cNvPr id="7" name="TextBox 6"/>
+          <p:cNvSpPr txBox="1"/>
+          <p:nvPr/>
+        </p:nvSpPr>
+        <p:spPr>
+          <a:xfrm>
+            <a:off x="914400" y="1371600"/>
+            <a:ext cx="4937760" cy="4572000"/>
+          </a:xfrm>
+          <a:prstGeom prst="rect">
+            <a:avLst/>
+          </a:prstGeom>
+          <a:noFill/>
+        </p:spPr>
+        <p:txBody>
+          <a:bodyPr wrap="square">
+            <a:spAutoFit/>
+          </a:bodyPr>
+          <a:lstStyle/>
+          <a:p>
+            <a:pPr>
+              <a:spcAft>
                 <a:spcPts val="1000"/>
               </a:spcAft>
-              <a:defRPr b="1" sz="1500">
+              <a:defRPr b="1" sz="1450">
+                <a:solidFill>
+                  <a:srgbClr val="D97706"/>
+                </a:solidFill>
+              </a:defRPr>
+            </a:pPr>
+            <a:r>
+              <a:t>📚 KTU High-Yield Questions (K3 Apply)</a:t>
+            </a:r>
+          </a:p>
+          <a:p>
+            <a:pPr>
+              <a:spcAft>
+                <a:spcPts val="700"/>
+              </a:spcAft>
+              <a:defRPr sz="1200">
+                <a:solidFill>
+                  <a:srgbClr val="0F172A"/>
+                </a:solidFill>
+              </a:defRPr>
+            </a:pPr>
+            <a:r>
+              <a:t>Q: Differentiate between Traffic Policing and Traffic Shaping with neat diagrams. (6 Marks)</a:t>
+            </a:r>
+          </a:p>
+          <a:p>
+            <a:pPr>
+              <a:spcAft>
+                <a:spcPts val="700"/>
+              </a:spcAft>
+              <a:defRPr sz="1200">
+                <a:solidFill>
+                  <a:srgbClr val="0F172A"/>
+                </a:solidFill>
+              </a:defRPr>
+            </a:pPr>
+            <a:r>
+              <a:t>Q: Compare Leaky Bucket and Token Bucket traffic shaping algorithms with equations and operating principles. (8 Marks)</a:t>
+            </a:r>
+          </a:p>
+          <a:p>
+            <a:pPr>
+              <a:spcAft>
+                <a:spcPts val="700"/>
+              </a:spcAft>
+              <a:defRPr sz="1200">
+                <a:solidFill>
+                  <a:srgbClr val="0F172A"/>
+                </a:solidFill>
+              </a:defRPr>
+            </a:pPr>
+            <a:r>
+              <a:t>Q: Explain Differentiated Services (DiffServ) architecture: Packet Classification, DSCP marking, and Per-Hop Behaviors (EF &amp; AF). (7 Marks)</a:t>
+            </a:r>
+          </a:p>
+        </p:txBody>
+      </p:sp>
+      <p:sp>
+        <p:nvSpPr>
+          <p:cNvPr id="8" name="Rounded Rectangle 7"/>
+          <p:cNvSpPr/>
+          <p:nvPr/>
+        </p:nvSpPr>
+        <p:spPr>
+          <a:xfrm>
+            <a:off x="6309360" y="1234440"/>
+            <a:ext cx="5212080" cy="4892040"/>
+          </a:xfrm>
+          <a:prstGeom prst="roundRect">
+            <a:avLst/>
+          </a:prstGeom>
+          <a:solidFill>
+            <a:srgbClr val="EEF2FF"/>
+          </a:solidFill>
+          <a:ln w="19050">
+            <a:solidFill>
+              <a:srgbClr val="0E7490"/>
+            </a:solidFill>
+          </a:ln>
+        </p:spPr>
+        <p:style>
+          <a:lnRef idx="1">
+            <a:schemeClr val="accent1"/>
+          </a:lnRef>
+          <a:fillRef idx="3">
+            <a:schemeClr val="accent1"/>
+          </a:fillRef>
+          <a:effectRef idx="2">
+            <a:schemeClr val="accent1"/>
+          </a:effectRef>
+          <a:fontRef idx="minor">
+            <a:schemeClr val="lt1"/>
+          </a:fontRef>
+        </p:style>
+        <p:txBody>
+          <a:bodyPr rtlCol="0" anchor="ctr"/>
+          <a:lstStyle/>
+          <a:p>
+            <a:pPr algn="ctr"/>
+          </a:p>
+        </p:txBody>
+      </p:sp>
+      <p:sp>
+        <p:nvSpPr>
+          <p:cNvPr id="9" name="TextBox 8"/>
+          <p:cNvSpPr txBox="1"/>
+          <p:nvPr/>
+        </p:nvSpPr>
+        <p:spPr>
+          <a:xfrm>
+            <a:off x="6492240" y="1371600"/>
+            <a:ext cx="4846320" cy="4572000"/>
+          </a:xfrm>
+          <a:prstGeom prst="rect">
+            <a:avLst/>
+          </a:prstGeom>
+          <a:noFill/>
+        </p:spPr>
+        <p:txBody>
+          <a:bodyPr wrap="square">
+            <a:spAutoFit/>
+          </a:bodyPr>
+          <a:lstStyle/>
+          <a:p>
+            <a:pPr>
+              <a:spcAft>
+                <a:spcPts val="1000"/>
+              </a:spcAft>
+              <a:defRPr b="1" sz="1450">
                 <a:solidFill>
                   <a:srgbClr val="0E7490"/>
                 </a:solidFill>
               </a:defRPr>
             </a:pPr>
             <a:r>
-              <a:t>QoS Model Summary</a:t>
+              <a:t>💡 Critical Conceptual Takeaways</a:t>
             </a:r>
           </a:p>
           <a:p>
@@ -4168,12 +4899,12 @@
               </a:spcAft>
               <a:defRPr sz="1200">
                 <a:solidFill>
-                  <a:srgbClr val="1E293B"/>
+                  <a:srgbClr val="0F172A"/>
                 </a:solidFill>
               </a:defRPr>
             </a:pPr>
             <a:r>
-              <a:t>→ IntServ: Per-flow, RSVP, stateful, unscalable</a:t>
+              <a:t>✔ Leaky bucket produces rigid constant output; Token bucket permits regulated bursts.</a:t>
             </a:r>
           </a:p>
           <a:p>
@@ -4183,12 +4914,12 @@
               </a:spcAft>
               <a:defRPr sz="1200">
                 <a:solidFill>
-                  <a:srgbClr val="1E293B"/>
+                  <a:srgbClr val="0F172A"/>
                 </a:solidFill>
               </a:defRPr>
             </a:pPr>
             <a:r>
-              <a:t>→ DiffServ: Class-based, DSCP, stateless core</a:t>
+              <a:t>✔ Weighted Fair Queuing (WFQ) guarantees minimum bandwidth shares to different service classes.</a:t>
             </a:r>
           </a:p>
           <a:p>
@@ -4198,41 +4929,26 @@
               </a:spcAft>
               <a:defRPr sz="1200">
                 <a:solidFill>
-                  <a:srgbClr val="1E293B"/>
+                  <a:srgbClr val="0F172A"/>
                 </a:solidFill>
               </a:defRPr>
             </a:pPr>
             <a:r>
-              <a:t>→ Leaky Bucket: Constant output rate</a:t>
-            </a:r>
-          </a:p>
-          <a:p>
-            <a:pPr>
-              <a:spcAft>
-                <a:spcPts val="600"/>
-              </a:spcAft>
-              <a:defRPr sz="1200">
-                <a:solidFill>
-                  <a:srgbClr val="1E293B"/>
-                </a:solidFill>
-              </a:defRPr>
-            </a:pPr>
-            <a:r>
-              <a:t>→ Token Bucket: Allows controlled bursts</a:t>
-            </a:r>
-          </a:p>
-        </p:txBody>
-      </p:sp>
-      <p:sp>
-        <p:nvSpPr>
-          <p:cNvPr id="9" name="TextBox 8"/>
+              <a:t>✔ DiffServ scales across WANs by classifying packets at boundary routers and using 6-bit DSCP markings.</a:t>
+            </a:r>
+          </a:p>
+        </p:txBody>
+      </p:sp>
+      <p:sp>
+        <p:nvSpPr>
+          <p:cNvPr id="10" name="TextBox 9"/>
           <p:cNvSpPr txBox="1"/>
           <p:nvPr/>
         </p:nvSpPr>
         <p:spPr>
           <a:xfrm>
-            <a:off x="731520" y="6309360"/>
-            <a:ext cx="10789920" cy="365760"/>
+            <a:off x="731520" y="6327648"/>
+            <a:ext cx="10789920" cy="320040"/>
           </a:xfrm>
           <a:prstGeom prst="rect">
             <a:avLst/>
@@ -4254,6 +4970,41 @@
             </a:pPr>
             <a:r>
               <a:t>PCCST501 Computer Networks | KTU 2024 Scheme | Prof. Anju Markose | Assistant Professor, Dept. of CSE | VJCET</a:t>
+            </a:r>
+          </a:p>
+        </p:txBody>
+      </p:sp>
+      <p:sp>
+        <p:nvSpPr>
+          <p:cNvPr id="11" name="TextBox 10"/>
+          <p:cNvSpPr txBox="1"/>
+          <p:nvPr/>
+        </p:nvSpPr>
+        <p:spPr>
+          <a:xfrm>
+            <a:off x="6858000" y="6327648"/>
+            <a:ext cx="4572000" cy="320040"/>
+          </a:xfrm>
+          <a:prstGeom prst="rect">
+            <a:avLst/>
+          </a:prstGeom>
+          <a:noFill/>
+        </p:spPr>
+        <p:txBody>
+          <a:bodyPr wrap="none">
+            <a:spAutoFit/>
+          </a:bodyPr>
+          <a:lstStyle/>
+          <a:p>
+            <a:pPr algn="r">
+              <a:defRPr sz="950">
+                <a:solidFill>
+                  <a:srgbClr val="64748B"/>
+                </a:solidFill>
+              </a:defRPr>
+            </a:pPr>
+            <a:r>
+              <a:t>Dept. of CSE, VJCET</a:t>
             </a:r>
           </a:p>
         </p:txBody>
